--- a/Drought_Monitor_WG/Reports/NM_NDVI_6Jan2026.pptx
+++ b/Drought_Monitor_WG/Reports/NM_NDVI_6Jan2026.pptx
@@ -107,6 +107,11 @@
       </a:defRPr>
     </a:lvl9pPr>
   </p:defaultTextStyle>
+  <p:extLst>
+    <p:ext uri="{EFAFB233-063F-42B5-8137-9DF3F51BA10A}">
+      <p15:sldGuideLst xmlns:p15="http://schemas.microsoft.com/office/powerpoint/2012/main"/>
+    </p:ext>
+  </p:extLst>
 </p:presentation>
 </file>
 
@@ -257,7 +262,7 @@
           <a:p>
             <a:fld id="{8AFB541B-0CF4-4D05-9ED3-E1709A98E057}" type="datetimeFigureOut">
               <a:rPr lang="en-US" smtClean="0"/>
-              <a:t>1/6/2026</a:t>
+              <a:t>5/26/2026</a:t>
             </a:fld>
             <a:endParaRPr lang="en-US"/>
           </a:p>
@@ -455,7 +460,7 @@
           <a:p>
             <a:fld id="{8AFB541B-0CF4-4D05-9ED3-E1709A98E057}" type="datetimeFigureOut">
               <a:rPr lang="en-US" smtClean="0"/>
-              <a:t>1/6/2026</a:t>
+              <a:t>5/26/2026</a:t>
             </a:fld>
             <a:endParaRPr lang="en-US"/>
           </a:p>
@@ -663,7 +668,7 @@
           <a:p>
             <a:fld id="{8AFB541B-0CF4-4D05-9ED3-E1709A98E057}" type="datetimeFigureOut">
               <a:rPr lang="en-US" smtClean="0"/>
-              <a:t>1/6/2026</a:t>
+              <a:t>5/26/2026</a:t>
             </a:fld>
             <a:endParaRPr lang="en-US"/>
           </a:p>
@@ -861,7 +866,7 @@
           <a:p>
             <a:fld id="{8AFB541B-0CF4-4D05-9ED3-E1709A98E057}" type="datetimeFigureOut">
               <a:rPr lang="en-US" smtClean="0"/>
-              <a:t>1/6/2026</a:t>
+              <a:t>5/26/2026</a:t>
             </a:fld>
             <a:endParaRPr lang="en-US"/>
           </a:p>
@@ -1136,7 +1141,7 @@
           <a:p>
             <a:fld id="{8AFB541B-0CF4-4D05-9ED3-E1709A98E057}" type="datetimeFigureOut">
               <a:rPr lang="en-US" smtClean="0"/>
-              <a:t>1/6/2026</a:t>
+              <a:t>5/26/2026</a:t>
             </a:fld>
             <a:endParaRPr lang="en-US"/>
           </a:p>
@@ -1401,7 +1406,7 @@
           <a:p>
             <a:fld id="{8AFB541B-0CF4-4D05-9ED3-E1709A98E057}" type="datetimeFigureOut">
               <a:rPr lang="en-US" smtClean="0"/>
-              <a:t>1/6/2026</a:t>
+              <a:t>5/26/2026</a:t>
             </a:fld>
             <a:endParaRPr lang="en-US"/>
           </a:p>
@@ -1813,7 +1818,7 @@
           <a:p>
             <a:fld id="{8AFB541B-0CF4-4D05-9ED3-E1709A98E057}" type="datetimeFigureOut">
               <a:rPr lang="en-US" smtClean="0"/>
-              <a:t>1/6/2026</a:t>
+              <a:t>5/26/2026</a:t>
             </a:fld>
             <a:endParaRPr lang="en-US"/>
           </a:p>
@@ -1954,7 +1959,7 @@
           <a:p>
             <a:fld id="{8AFB541B-0CF4-4D05-9ED3-E1709A98E057}" type="datetimeFigureOut">
               <a:rPr lang="en-US" smtClean="0"/>
-              <a:t>1/6/2026</a:t>
+              <a:t>5/26/2026</a:t>
             </a:fld>
             <a:endParaRPr lang="en-US"/>
           </a:p>
@@ -2067,7 +2072,7 @@
           <a:p>
             <a:fld id="{8AFB541B-0CF4-4D05-9ED3-E1709A98E057}" type="datetimeFigureOut">
               <a:rPr lang="en-US" smtClean="0"/>
-              <a:t>1/6/2026</a:t>
+              <a:t>5/26/2026</a:t>
             </a:fld>
             <a:endParaRPr lang="en-US"/>
           </a:p>
@@ -2378,7 +2383,7 @@
           <a:p>
             <a:fld id="{8AFB541B-0CF4-4D05-9ED3-E1709A98E057}" type="datetimeFigureOut">
               <a:rPr lang="en-US" smtClean="0"/>
-              <a:t>1/6/2026</a:t>
+              <a:t>5/26/2026</a:t>
             </a:fld>
             <a:endParaRPr lang="en-US"/>
           </a:p>
@@ -2666,7 +2671,7 @@
           <a:p>
             <a:fld id="{8AFB541B-0CF4-4D05-9ED3-E1709A98E057}" type="datetimeFigureOut">
               <a:rPr lang="en-US" smtClean="0"/>
-              <a:t>1/6/2026</a:t>
+              <a:t>5/26/2026</a:t>
             </a:fld>
             <a:endParaRPr lang="en-US"/>
           </a:p>
@@ -2907,7 +2912,7 @@
           <a:p>
             <a:fld id="{8AFB541B-0CF4-4D05-9ED3-E1709A98E057}" type="datetimeFigureOut">
               <a:rPr lang="en-US" smtClean="0"/>
-              <a:t>1/6/2026</a:t>
+              <a:t>5/26/2026</a:t>
             </a:fld>
             <a:endParaRPr lang="en-US"/>
           </a:p>
@@ -3324,36 +3329,6 @@
           <a:chExt cx="0" cy="0"/>
         </a:xfrm>
       </p:grpSpPr>
-      <p:pic>
-        <p:nvPicPr>
-          <p:cNvPr id="4" name="Picture 3">
-            <a:extLst>
-              <a:ext uri="{FF2B5EF4-FFF2-40B4-BE49-F238E27FC236}">
-                <a16:creationId xmlns:a16="http://schemas.microsoft.com/office/drawing/2014/main" id="{B167552A-0C0C-1A0A-BDC5-3D70FD6DF16A}"/>
-              </a:ext>
-            </a:extLst>
-          </p:cNvPr>
-          <p:cNvPicPr>
-            <a:picLocks noChangeAspect="1"/>
-          </p:cNvPicPr>
-          <p:nvPr/>
-        </p:nvPicPr>
-        <p:blipFill>
-          <a:blip r:embed="rId2"/>
-          <a:stretch>
-            <a:fillRect/>
-          </a:stretch>
-        </p:blipFill>
-        <p:spPr>
-          <a:xfrm>
-            <a:off x="5999230" y="515718"/>
-            <a:ext cx="4807994" cy="5826564"/>
-          </a:xfrm>
-          <a:prstGeom prst="rect">
-            <a:avLst/>
-          </a:prstGeom>
-        </p:spPr>
-      </p:pic>
       <p:sp>
         <p:nvSpPr>
           <p:cNvPr id="6" name="TextBox 5">
@@ -3393,7 +3368,7 @@
           <a:p>
             <a:r>
               <a:rPr lang="en-US" sz="1200" dirty="0"/>
-              <a:t>December 27, 2025 – January 3, 2026</a:t>
+              <a:t>May 12, 2026 – May 19, 2026</a:t>
             </a:r>
           </a:p>
           <a:p>
@@ -3428,7 +3403,7 @@
           <p:nvPr/>
         </p:nvPicPr>
         <p:blipFill>
-          <a:blip r:embed="rId3">
+          <a:blip r:embed="rId2">
             <a:extLst>
               <a:ext uri="{28A0092B-C50C-407E-A947-70E740481C1C}">
                 <a14:useLocalDpi xmlns:a14="http://schemas.microsoft.com/office/drawing/2010/main" val="0"/>
@@ -3443,6 +3418,36 @@
           <a:xfrm>
             <a:off x="10868836" y="1900713"/>
             <a:ext cx="1085850" cy="2686050"/>
+          </a:xfrm>
+          <a:prstGeom prst="rect">
+            <a:avLst/>
+          </a:prstGeom>
+        </p:spPr>
+      </p:pic>
+      <p:pic>
+        <p:nvPicPr>
+          <p:cNvPr id="12" name="Picture 11">
+            <a:extLst>
+              <a:ext uri="{FF2B5EF4-FFF2-40B4-BE49-F238E27FC236}">
+                <a16:creationId xmlns:a16="http://schemas.microsoft.com/office/drawing/2014/main" id="{9C3AEBA2-C180-DB0C-3024-58073279D4EB}"/>
+              </a:ext>
+            </a:extLst>
+          </p:cNvPr>
+          <p:cNvPicPr>
+            <a:picLocks noChangeAspect="1"/>
+          </p:cNvPicPr>
+          <p:nvPr/>
+        </p:nvPicPr>
+        <p:blipFill>
+          <a:blip r:embed="rId3"/>
+          <a:stretch>
+            <a:fillRect/>
+          </a:stretch>
+        </p:blipFill>
+        <p:spPr>
+          <a:xfrm>
+            <a:off x="5223015" y="347232"/>
+            <a:ext cx="5477639" cy="6163535"/>
           </a:xfrm>
           <a:prstGeom prst="rect">
             <a:avLst/>
@@ -3487,10 +3492,10 @@
       </p:grpSpPr>
       <p:pic>
         <p:nvPicPr>
-          <p:cNvPr id="3" name="Picture 2">
-            <a:extLst>
-              <a:ext uri="{FF2B5EF4-FFF2-40B4-BE49-F238E27FC236}">
-                <a16:creationId xmlns:a16="http://schemas.microsoft.com/office/drawing/2014/main" id="{0048A7E6-0F32-1851-1399-BE227A90F087}"/>
+          <p:cNvPr id="7" name="Picture 6">
+            <a:extLst>
+              <a:ext uri="{FF2B5EF4-FFF2-40B4-BE49-F238E27FC236}">
+                <a16:creationId xmlns:a16="http://schemas.microsoft.com/office/drawing/2014/main" id="{615D7081-D9E6-65AE-2487-128AE0D859F6}"/>
               </a:ext>
             </a:extLst>
           </p:cNvPr>
@@ -3507,15 +3512,15 @@
               </a:ext>
             </a:extLst>
           </a:blip>
-          <a:srcRect r="10391"/>
+          <a:srcRect r="11033"/>
           <a:stretch>
             <a:fillRect/>
           </a:stretch>
         </p:blipFill>
         <p:spPr>
           <a:xfrm>
-            <a:off x="4143030" y="0"/>
-            <a:ext cx="8029920" cy="6400800"/>
+            <a:off x="4219569" y="0"/>
+            <a:ext cx="7972432" cy="6400800"/>
           </a:xfrm>
           <a:prstGeom prst="rect">
             <a:avLst/>
@@ -3561,7 +3566,7 @@
           <a:p>
             <a:r>
               <a:rPr lang="en-US" sz="1200" dirty="0"/>
-              <a:t>January 4, 2026</a:t>
+              <a:t>May 19, 2026</a:t>
             </a:r>
           </a:p>
           <a:p>
@@ -3619,10 +3624,10 @@
       </p:grpSpPr>
       <p:pic>
         <p:nvPicPr>
-          <p:cNvPr id="5" name="Picture 4">
-            <a:extLst>
-              <a:ext uri="{FF2B5EF4-FFF2-40B4-BE49-F238E27FC236}">
-                <a16:creationId xmlns:a16="http://schemas.microsoft.com/office/drawing/2014/main" id="{54459C0B-8508-AC43-ED15-F17898369DFA}"/>
+          <p:cNvPr id="4" name="Picture 3">
+            <a:extLst>
+              <a:ext uri="{FF2B5EF4-FFF2-40B4-BE49-F238E27FC236}">
+                <a16:creationId xmlns:a16="http://schemas.microsoft.com/office/drawing/2014/main" id="{F50BE627-0FD4-D67A-3953-52250B84E217}"/>
               </a:ext>
             </a:extLst>
           </p:cNvPr>
@@ -3693,7 +3698,7 @@
           <a:p>
             <a:r>
               <a:rPr lang="en-US" sz="1200" dirty="0"/>
-              <a:t>January 4, 2026</a:t>
+              <a:t>May 19, 2026</a:t>
             </a:r>
           </a:p>
           <a:p>
@@ -3748,10 +3753,10 @@
       </p:grpSpPr>
       <p:pic>
         <p:nvPicPr>
-          <p:cNvPr id="5" name="Picture 4">
-            <a:extLst>
-              <a:ext uri="{FF2B5EF4-FFF2-40B4-BE49-F238E27FC236}">
-                <a16:creationId xmlns:a16="http://schemas.microsoft.com/office/drawing/2014/main" id="{8E272EAA-8235-B18A-F3BA-0E2C11BDAEA2}"/>
+          <p:cNvPr id="4" name="Picture 3">
+            <a:extLst>
+              <a:ext uri="{FF2B5EF4-FFF2-40B4-BE49-F238E27FC236}">
+                <a16:creationId xmlns:a16="http://schemas.microsoft.com/office/drawing/2014/main" id="{C6E31D6B-B446-5532-6CB9-38A1FB25F1D0}"/>
               </a:ext>
             </a:extLst>
           </p:cNvPr>
@@ -3768,15 +3773,14 @@
               </a:ext>
             </a:extLst>
           </a:blip>
-          <a:srcRect r="10150"/>
           <a:stretch>
             <a:fillRect/>
           </a:stretch>
         </p:blipFill>
         <p:spPr>
           <a:xfrm>
-            <a:off x="4140433" y="0"/>
-            <a:ext cx="8051567" cy="6400800"/>
+            <a:off x="4566348" y="0"/>
+            <a:ext cx="8961121" cy="6400800"/>
           </a:xfrm>
           <a:prstGeom prst="rect">
             <a:avLst/>
@@ -3822,7 +3826,7 @@
           <a:p>
             <a:r>
               <a:rPr lang="en-US" sz="1200" dirty="0"/>
-              <a:t>January 4, 2026</a:t>
+              <a:t>May 19, 2026</a:t>
             </a:r>
           </a:p>
           <a:p>
